--- a/data-eng/decks/w2d2s3.pptx
+++ b/data-eng/decks/w2d2s3.pptx
@@ -4543,7 +4543,7 @@
                 <a:ea typeface="Pretendard"/>
                 <a:cs typeface="Pretendard"/>
               </a:rPr>
-              <a:t>WHERE rn = 1 은 Unknown column, CTE 로 감싸면 달마다 1위 한 행</a:t>
+              <a:t>WHERE rn = 1 은 Unknown column, CTE 로 감싸면 3행(세 달 모두 전자)</a:t>
             </a:r>
           </a:p>
         </p:txBody>
@@ -6860,7 +6860,7 @@
                 <a:ea typeface="Pretendard"/>
                 <a:cs typeface="Pretendard"/>
               </a:rPr>
-              <a:t>5단계에서 한 쿼리에 모으고 WINDOW w AS (…) 로 OVER 반복을 줄입니다. 7단계는 미니 과제</a:t>
+              <a:t>5단계는 동점용 생활 행이 있어 10행입니다. WINDOW w AS (…) 로 OVER 반복을 줄이고, 7단계는 미니 과제</a:t>
             </a:r>
           </a:p>
         </p:txBody>
@@ -14927,7 +14927,7 @@
                 <a:ea typeface="Pretendard"/>
                 <a:cs typeface="Pretendard"/>
               </a:rPr>
-              <a:t>1월은 전자·생활 동점인데</a:t>
+              <a:t>1월 전자·생활 동점 — 하나만</a:t>
             </a:r>
           </a:p>
           <a:p>
@@ -14945,7 +14945,7 @@
                 <a:ea typeface="Pretendard"/>
                 <a:cs typeface="Pretendard"/>
               </a:rPr>
-              <a:t>둘 중 하나만 나온다</a:t>
+              <a:t>세 달 모두 전자 (실측, 보장 없음)</a:t>
             </a:r>
           </a:p>
         </p:txBody>

--- a/data-eng/decks/w2d2s3.pptx
+++ b/data-eng/decks/w2d2s3.pptx
@@ -3826,12 +3826,12 @@
         </p:nvSpPr>
         <p:spPr>
           <a:xfrm>
-            <a:off x="1143000" y="2867025"/>
-            <a:ext cx="16002000" cy="742950"/>
+            <a:off x="1143000" y="2871788"/>
+            <a:ext cx="16002000" cy="619125"/>
           </a:xfrm>
           <a:prstGeom prst="roundRect">
             <a:avLst>
-              <a:gd name="adj" fmla="val 6410"/>
+              <a:gd name="adj" fmla="val 7692"/>
             </a:avLst>
           </a:prstGeom>
           <a:solidFill>
@@ -3860,7 +3860,7 @@
         </p:nvSpPr>
         <p:spPr>
           <a:xfrm>
-            <a:off x="1390650" y="2971800"/>
+            <a:off x="1390650" y="2914650"/>
             <a:ext cx="533400" cy="533400"/>
           </a:xfrm>
           <a:prstGeom prst="ellipse">
@@ -3890,7 +3890,7 @@
         </p:nvSpPr>
         <p:spPr>
           <a:xfrm>
-            <a:off x="1390650" y="3095625"/>
+            <a:off x="1390650" y="3038475"/>
             <a:ext cx="533400" cy="323850"/>
           </a:xfrm>
           <a:prstGeom prst="rect">
@@ -3931,8 +3931,8 @@
         </p:nvSpPr>
         <p:spPr>
           <a:xfrm>
-            <a:off x="2190750" y="2867025"/>
-            <a:ext cx="14573250" cy="742950"/>
+            <a:off x="2190750" y="2871788"/>
+            <a:ext cx="14573250" cy="619125"/>
           </a:xfrm>
           <a:prstGeom prst="rect">
             <a:avLst/>
@@ -3972,12 +3972,12 @@
         </p:nvSpPr>
         <p:spPr>
           <a:xfrm>
-            <a:off x="1143000" y="3724275"/>
-            <a:ext cx="16002000" cy="742950"/>
+            <a:off x="1143000" y="3605212"/>
+            <a:ext cx="16002000" cy="619125"/>
           </a:xfrm>
           <a:prstGeom prst="roundRect">
             <a:avLst>
-              <a:gd name="adj" fmla="val 6410"/>
+              <a:gd name="adj" fmla="val 7692"/>
             </a:avLst>
           </a:prstGeom>
           <a:solidFill>
@@ -4006,7 +4006,7 @@
         </p:nvSpPr>
         <p:spPr>
           <a:xfrm>
-            <a:off x="1390650" y="3829050"/>
+            <a:off x="1390650" y="3648075"/>
             <a:ext cx="533400" cy="533400"/>
           </a:xfrm>
           <a:prstGeom prst="ellipse">
@@ -4036,7 +4036,7 @@
         </p:nvSpPr>
         <p:spPr>
           <a:xfrm>
-            <a:off x="1390650" y="3952875"/>
+            <a:off x="1390650" y="3771900"/>
             <a:ext cx="533400" cy="323850"/>
           </a:xfrm>
           <a:prstGeom prst="rect">
@@ -4077,8 +4077,8 @@
         </p:nvSpPr>
         <p:spPr>
           <a:xfrm>
-            <a:off x="2190750" y="3724275"/>
-            <a:ext cx="14573250" cy="742950"/>
+            <a:off x="2190750" y="3605212"/>
+            <a:ext cx="14573250" cy="619125"/>
           </a:xfrm>
           <a:prstGeom prst="rect">
             <a:avLst/>
@@ -4118,12 +4118,12 @@
         </p:nvSpPr>
         <p:spPr>
           <a:xfrm>
-            <a:off x="1143000" y="4581525"/>
-            <a:ext cx="16002000" cy="742950"/>
+            <a:off x="1143000" y="4338638"/>
+            <a:ext cx="16002000" cy="619125"/>
           </a:xfrm>
           <a:prstGeom prst="roundRect">
             <a:avLst>
-              <a:gd name="adj" fmla="val 6410"/>
+              <a:gd name="adj" fmla="val 7692"/>
             </a:avLst>
           </a:prstGeom>
           <a:solidFill>
@@ -4152,7 +4152,7 @@
         </p:nvSpPr>
         <p:spPr>
           <a:xfrm>
-            <a:off x="1390650" y="4686300"/>
+            <a:off x="1390650" y="4381500"/>
             <a:ext cx="533400" cy="533400"/>
           </a:xfrm>
           <a:prstGeom prst="ellipse">
@@ -4182,7 +4182,7 @@
         </p:nvSpPr>
         <p:spPr>
           <a:xfrm>
-            <a:off x="1390650" y="4810125"/>
+            <a:off x="1390650" y="4505325"/>
             <a:ext cx="533400" cy="323850"/>
           </a:xfrm>
           <a:prstGeom prst="rect">
@@ -4223,8 +4223,8 @@
         </p:nvSpPr>
         <p:spPr>
           <a:xfrm>
-            <a:off x="2190750" y="4581525"/>
-            <a:ext cx="14573250" cy="742950"/>
+            <a:off x="2190750" y="4338638"/>
+            <a:ext cx="14573250" cy="619125"/>
           </a:xfrm>
           <a:prstGeom prst="rect">
             <a:avLst/>
@@ -4264,12 +4264,12 @@
         </p:nvSpPr>
         <p:spPr>
           <a:xfrm>
-            <a:off x="1143000" y="5438775"/>
-            <a:ext cx="16002000" cy="742950"/>
+            <a:off x="1143000" y="5072062"/>
+            <a:ext cx="16002000" cy="619125"/>
           </a:xfrm>
           <a:prstGeom prst="roundRect">
             <a:avLst>
-              <a:gd name="adj" fmla="val 6410"/>
+              <a:gd name="adj" fmla="val 7692"/>
             </a:avLst>
           </a:prstGeom>
           <a:solidFill>
@@ -4298,7 +4298,7 @@
         </p:nvSpPr>
         <p:spPr>
           <a:xfrm>
-            <a:off x="1390650" y="5543550"/>
+            <a:off x="1390650" y="5114925"/>
             <a:ext cx="533400" cy="533400"/>
           </a:xfrm>
           <a:prstGeom prst="ellipse">
@@ -4328,7 +4328,7 @@
         </p:nvSpPr>
         <p:spPr>
           <a:xfrm>
-            <a:off x="1390650" y="5667375"/>
+            <a:off x="1390650" y="5238750"/>
             <a:ext cx="533400" cy="323850"/>
           </a:xfrm>
           <a:prstGeom prst="rect">
@@ -4369,8 +4369,8 @@
         </p:nvSpPr>
         <p:spPr>
           <a:xfrm>
-            <a:off x="2190750" y="5438775"/>
-            <a:ext cx="14573250" cy="742950"/>
+            <a:off x="2190750" y="5072062"/>
+            <a:ext cx="14573250" cy="619125"/>
           </a:xfrm>
           <a:prstGeom prst="rect">
             <a:avLst/>
@@ -4410,12 +4410,12 @@
         </p:nvSpPr>
         <p:spPr>
           <a:xfrm>
-            <a:off x="1143000" y="6296025"/>
-            <a:ext cx="16002000" cy="742950"/>
+            <a:off x="1143000" y="5805488"/>
+            <a:ext cx="16002000" cy="619125"/>
           </a:xfrm>
           <a:prstGeom prst="roundRect">
             <a:avLst>
-              <a:gd name="adj" fmla="val 6410"/>
+              <a:gd name="adj" fmla="val 7692"/>
             </a:avLst>
           </a:prstGeom>
           <a:solidFill>
@@ -4444,7 +4444,7 @@
         </p:nvSpPr>
         <p:spPr>
           <a:xfrm>
-            <a:off x="1390650" y="6400800"/>
+            <a:off x="1390650" y="5848350"/>
             <a:ext cx="533400" cy="533400"/>
           </a:xfrm>
           <a:prstGeom prst="ellipse">
@@ -4474,7 +4474,7 @@
         </p:nvSpPr>
         <p:spPr>
           <a:xfrm>
-            <a:off x="1390650" y="6524625"/>
+            <a:off x="1390650" y="5972175"/>
             <a:ext cx="533400" cy="323850"/>
           </a:xfrm>
           <a:prstGeom prst="rect">
@@ -4515,8 +4515,8 @@
         </p:nvSpPr>
         <p:spPr>
           <a:xfrm>
-            <a:off x="2190750" y="6296025"/>
-            <a:ext cx="14573250" cy="742950"/>
+            <a:off x="2190750" y="5805488"/>
+            <a:ext cx="14573250" cy="619125"/>
           </a:xfrm>
           <a:prstGeom prst="rect">
             <a:avLst/>
@@ -4543,7 +4543,7 @@
                 <a:ea typeface="Pretendard"/>
                 <a:cs typeface="Pretendard"/>
               </a:rPr>
-              <a:t>WHERE rn = 1 은 Unknown column, CTE 로 감싸면 3행(세 달 모두 전자)</a:t>
+              <a:t>5단계 10행 — 2026-01 순위 생활·전자 1, 식품 3, 잡화 4</a:t>
             </a:r>
           </a:p>
         </p:txBody>
@@ -4556,12 +4556,12 @@
         </p:nvSpPr>
         <p:spPr>
           <a:xfrm>
-            <a:off x="1143000" y="7153275"/>
-            <a:ext cx="16002000" cy="742950"/>
+            <a:off x="1143000" y="6538912"/>
+            <a:ext cx="16002000" cy="619125"/>
           </a:xfrm>
           <a:prstGeom prst="roundRect">
             <a:avLst>
-              <a:gd name="adj" fmla="val 6410"/>
+              <a:gd name="adj" fmla="val 7692"/>
             </a:avLst>
           </a:prstGeom>
           <a:solidFill>
@@ -4590,7 +4590,7 @@
         </p:nvSpPr>
         <p:spPr>
           <a:xfrm>
-            <a:off x="1390650" y="7258050"/>
+            <a:off x="1390650" y="6581775"/>
             <a:ext cx="533400" cy="533400"/>
           </a:xfrm>
           <a:prstGeom prst="ellipse">
@@ -4620,7 +4620,7 @@
         </p:nvSpPr>
         <p:spPr>
           <a:xfrm>
-            <a:off x="1390650" y="7381875"/>
+            <a:off x="1390650" y="6705600"/>
             <a:ext cx="533400" cy="323850"/>
           </a:xfrm>
           <a:prstGeom prst="rect">
@@ -4661,8 +4661,8 @@
         </p:nvSpPr>
         <p:spPr>
           <a:xfrm>
-            <a:off x="2190750" y="7153275"/>
-            <a:ext cx="14573250" cy="742950"/>
+            <a:off x="2190750" y="6538912"/>
+            <a:ext cx="14573250" cy="619125"/>
           </a:xfrm>
           <a:prstGeom prst="rect">
             <a:avLst/>
@@ -4689,6 +4689,152 @@
                 <a:ea typeface="Pretendard"/>
                 <a:cs typeface="Pretendard"/>
               </a:rPr>
+              <a:t>WHERE rn = 1 은 Unknown column, CTE 로 감싸면 3행(세 달 모두 전자)</a:t>
+            </a:r>
+          </a:p>
+        </p:txBody>
+      </p:sp>
+      <p:sp>
+        <p:nvSpPr>
+          <p:cNvPr id="32" name="Rounded Rectangle 31"/>
+          <p:cNvSpPr/>
+          <p:nvPr/>
+        </p:nvSpPr>
+        <p:spPr>
+          <a:xfrm>
+            <a:off x="1143000" y="7272338"/>
+            <a:ext cx="16002000" cy="619125"/>
+          </a:xfrm>
+          <a:prstGeom prst="roundRect">
+            <a:avLst>
+              <a:gd name="adj" fmla="val 7692"/>
+            </a:avLst>
+          </a:prstGeom>
+          <a:solidFill>
+            <a:srgbClr val="FAFBFD"/>
+          </a:solidFill>
+          <a:ln w="9525">
+            <a:solidFill>
+              <a:srgbClr val="DCE1E8"/>
+            </a:solidFill>
+          </a:ln>
+          <a:effectLst/>
+        </p:spPr>
+        <p:txBody>
+          <a:bodyPr rtlCol="0" anchor="ctr" wrap="square"/>
+          <a:lstStyle/>
+          <a:p>
+            <a:pPr algn="ctr"/>
+          </a:p>
+        </p:txBody>
+      </p:sp>
+      <p:sp>
+        <p:nvSpPr>
+          <p:cNvPr id="33" name="Oval 32"/>
+          <p:cNvSpPr/>
+          <p:nvPr/>
+        </p:nvSpPr>
+        <p:spPr>
+          <a:xfrm>
+            <a:off x="1390650" y="7315200"/>
+            <a:ext cx="533400" cy="533400"/>
+          </a:xfrm>
+          <a:prstGeom prst="ellipse">
+            <a:avLst/>
+          </a:prstGeom>
+          <a:solidFill>
+            <a:srgbClr val="0D2B5E"/>
+          </a:solidFill>
+          <a:ln>
+            <a:noFill/>
+          </a:ln>
+          <a:effectLst/>
+        </p:spPr>
+        <p:txBody>
+          <a:bodyPr rtlCol="0" anchor="ctr" wrap="square"/>
+          <a:lstStyle/>
+          <a:p>
+            <a:pPr algn="ctr"/>
+          </a:p>
+        </p:txBody>
+      </p:sp>
+      <p:sp>
+        <p:nvSpPr>
+          <p:cNvPr id="34" name="TextBox 33"/>
+          <p:cNvSpPr txBox="1"/>
+          <p:nvPr/>
+        </p:nvSpPr>
+        <p:spPr>
+          <a:xfrm>
+            <a:off x="1390650" y="7439025"/>
+            <a:ext cx="533400" cy="323850"/>
+          </a:xfrm>
+          <a:prstGeom prst="rect">
+            <a:avLst/>
+          </a:prstGeom>
+          <a:noFill/>
+        </p:spPr>
+        <p:txBody>
+          <a:bodyPr wrap="square" lIns="0" rIns="0" tIns="0" bIns="0" anchor="t">
+            <a:spAutoFit/>
+          </a:bodyPr>
+          <a:lstStyle/>
+          <a:p>
+            <a:pPr algn="ctr">
+              <a:lnSpc>
+                <a:spcPct val="100000"/>
+              </a:lnSpc>
+            </a:pPr>
+            <a:r>
+              <a:rPr sz="2100" b="1">
+                <a:solidFill>
+                  <a:srgbClr val="FFFFFF"/>
+                </a:solidFill>
+                <a:latin typeface="Pretendard"/>
+                <a:ea typeface="Pretendard"/>
+                <a:cs typeface="Pretendard"/>
+              </a:rPr>
+              <a:t>7</a:t>
+            </a:r>
+          </a:p>
+        </p:txBody>
+      </p:sp>
+      <p:sp>
+        <p:nvSpPr>
+          <p:cNvPr id="35" name="TextBox 34"/>
+          <p:cNvSpPr txBox="1"/>
+          <p:nvPr/>
+        </p:nvSpPr>
+        <p:spPr>
+          <a:xfrm>
+            <a:off x="2190750" y="7272338"/>
+            <a:ext cx="14573250" cy="619125"/>
+          </a:xfrm>
+          <a:prstGeom prst="rect">
+            <a:avLst/>
+          </a:prstGeom>
+          <a:noFill/>
+        </p:spPr>
+        <p:txBody>
+          <a:bodyPr wrap="square" lIns="0" rIns="0" tIns="0" bIns="0" anchor="ctr">
+            <a:spAutoFit/>
+          </a:bodyPr>
+          <a:lstStyle/>
+          <a:p>
+            <a:pPr algn="l">
+              <a:lnSpc>
+                <a:spcPct val="100000"/>
+              </a:lnSpc>
+            </a:pPr>
+            <a:r>
+              <a:rPr sz="2100" b="1">
+                <a:solidFill>
+                  <a:srgbClr val="0D2B5E"/>
+                </a:solidFill>
+                <a:latin typeface="Pretendard"/>
+                <a:ea typeface="Pretendard"/>
+                <a:cs typeface="Pretendard"/>
+              </a:rPr>
               <a:t>이동 평균 전자: 1200 → 1350 → 1266.7</a:t>
             </a:r>
           </a:p>
@@ -4696,7 +4842,7 @@
       </p:sp>
       <p:sp>
         <p:nvSpPr>
-          <p:cNvPr id="32" name="Rectangle 31"/>
+          <p:cNvPr id="36" name="Rectangle 35"/>
           <p:cNvSpPr/>
           <p:nvPr/>
         </p:nvSpPr>
@@ -4726,7 +4872,7 @@
       </p:sp>
       <p:sp>
         <p:nvSpPr>
-          <p:cNvPr id="33" name="TextBox 32"/>
+          <p:cNvPr id="37" name="TextBox 36"/>
           <p:cNvSpPr txBox="1"/>
           <p:nvPr/>
         </p:nvSpPr>
@@ -4767,7 +4913,7 @@
       </p:sp>
       <p:sp>
         <p:nvSpPr>
-          <p:cNvPr id="34" name="TextBox 33"/>
+          <p:cNvPr id="38" name="TextBox 37"/>
           <p:cNvSpPr txBox="1"/>
           <p:nvPr/>
         </p:nvSpPr>
@@ -7006,7 +7152,7 @@
                 <a:ea typeface="Pretendard"/>
                 <a:cs typeface="Pretendard"/>
               </a:rPr>
-              <a:t>GROUP BY vs Window · ORDER BY 유무</a:t>
+              <a:t>행 수 비교 · ORDER BY 유무</a:t>
             </a:r>
           </a:p>
         </p:txBody>
@@ -7152,7 +7298,7 @@
                 <a:ea typeface="Pretendard"/>
                 <a:cs typeface="Pretendard"/>
               </a:rPr>
-              <a:t>순위 함수 3종 + 동점 실험</a:t>
+              <a:t>순위 3종 · 동점 실험</a:t>
             </a:r>
           </a:p>
         </p:txBody>
@@ -7444,7 +7590,7 @@
                 <a:ea typeface="Pretendard"/>
                 <a:cs typeface="Pretendard"/>
               </a:rPr>
-              <a:t>WINDOW w · WHERE rn 실패 → CTE</a:t>
+              <a:t>WINDOW w · rn 실패 → CTE</a:t>
             </a:r>
           </a:p>
         </p:txBody>
@@ -8109,7 +8255,7 @@
                 <a:ea typeface="Pretendard"/>
                 <a:cs typeface="Pretendard"/>
               </a:rPr>
-              <a:t>전자 3800 · 잡화 2000 · 식품 2400</a:t>
+              <a:t>식품 2400 · 잡화 2000 · 전자 3800</a:t>
             </a:r>
           </a:p>
         </p:txBody>
@@ -12644,7 +12790,7 @@
                 <a:ea typeface="Pretendard"/>
                 <a:cs typeface="Pretendard"/>
               </a:rPr>
-              <a:t>ROUND(diff * 100.0 / LAG(amount) OVER (…), 1)</a:t>
+              <a:t>ROUND((amount - LAG(…)) * 100.0 / LAG(…), 1)</a:t>
             </a:r>
           </a:p>
         </p:txBody>
@@ -14927,7 +15073,7 @@
                 <a:ea typeface="Pretendard"/>
                 <a:cs typeface="Pretendard"/>
               </a:rPr>
-              <a:t>1월 전자·생활 동점 — 하나만</a:t>
+              <a:t>세 달 모두 전자(실측)</a:t>
             </a:r>
           </a:p>
           <a:p>
@@ -14945,7 +15091,7 @@
                 <a:ea typeface="Pretendard"/>
                 <a:cs typeface="Pretendard"/>
               </a:rPr>
-              <a:t>세 달 모두 전자 (실측, 보장 없음)</a:t>
+              <a:t>1월은 동점이라 보장 없음</a:t>
             </a:r>
           </a:p>
         </p:txBody>
@@ -15152,11 +15298,11 @@
             </a:avLst>
           </a:prstGeom>
           <a:solidFill>
-            <a:srgbClr val="FAFBFD"/>
+            <a:srgbClr val="0D2B5E"/>
           </a:solidFill>
           <a:ln w="9525">
             <a:solidFill>
-              <a:srgbClr val="DCE1E8"/>
+              <a:srgbClr val="0D2B5E"/>
             </a:solidFill>
           </a:ln>
           <a:effectLst/>
@@ -15229,7 +15375,7 @@
             <a:r>
               <a:rPr sz="2550" b="1">
                 <a:solidFill>
-                  <a:srgbClr val="E4EBF4"/>
+                  <a:srgbClr val="3B4B7C"/>
                 </a:solidFill>
                 <a:latin typeface="Pretendard"/>
                 <a:ea typeface="Pretendard"/>
@@ -15270,7 +15416,7 @@
             <a:r>
               <a:rPr sz="3150" b="1">
                 <a:solidFill>
-                  <a:srgbClr val="0D2B5E"/>
+                  <a:srgbClr val="FFFFFF"/>
                 </a:solidFill>
                 <a:latin typeface="Pretendard"/>
                 <a:ea typeface="Pretendard"/>
@@ -15291,7 +15437,7 @@
             <a:r>
               <a:rPr sz="2250" b="0">
                 <a:solidFill>
-                  <a:srgbClr val="3D3D3D"/>
+                  <a:srgbClr val="D9E2F0"/>
                 </a:solidFill>
                 <a:latin typeface="Pretendard"/>
                 <a:ea typeface="Pretendard"/>
@@ -15309,7 +15455,7 @@
             <a:r>
               <a:rPr sz="2250" b="0">
                 <a:solidFill>
-                  <a:srgbClr val="3D3D3D"/>
+                  <a:srgbClr val="D9E2F0"/>
                 </a:solidFill>
                 <a:latin typeface="Pretendard"/>
                 <a:ea typeface="Pretendard"/>
@@ -15386,7 +15532,7 @@
                 <a:ea typeface="Pretendard"/>
                 <a:cs typeface="Pretendard"/>
               </a:rPr>
-              <a:t>ROWS BETWEEN 은 창의 범위를 직접 지정 — 「2칸 앞부터 현재 행까지」. 첫 달은 자기 자신, 둘째 달은 2개월 평균</a:t>
+              <a:t>1월을 늘 같게 하려면 ORDER BY amount DESC, category 처럼 보조 기준. ROWS BETWEEN 은 「2칸 앞부터 현재 행까지」</a:t>
             </a:r>
           </a:p>
         </p:txBody>
